--- a/Assets/SIH-2026-VALIDRA.pptx
+++ b/Assets/SIH-2026-VALIDRA.pptx
@@ -141,7 +141,7 @@
           <a:p>
             <a:fld id="{1321ABF4-2A27-4B4A-B42C-D07480745A19}" type="datetimeFigureOut">
               <a:rPr lang="en-IN" smtClean="0"/>
-              <a:t>16-09-2026</a:t>
+              <a:t>17-09-2026</a:t>
             </a:fld>
             <a:endParaRPr lang="en-IN" dirty="0"/>
           </a:p>
@@ -15083,7 +15083,7 @@
           </a:bodyPr>
           <a:lstStyle/>
           <a:p>
-            <a:pPr>
+            <a:pPr algn="ctr">
               <a:lnSpc>
                 <a:spcPct val="100000"/>
               </a:lnSpc>
@@ -15099,7 +15099,7 @@
                 <a:latin typeface="Calibri"/>
                 <a:cs typeface="Calibri"/>
               </a:rPr>
-              <a:t>OCR.SPACE</a:t>
+              <a:t>OCR</a:t>
             </a:r>
             <a:endParaRPr sz="750" dirty="0">
               <a:latin typeface="Calibri"/>
@@ -15301,7 +15301,7 @@
         <p:spPr>
           <a:xfrm>
             <a:off x="787539" y="3930192"/>
-            <a:ext cx="650240" cy="286385"/>
+            <a:ext cx="650240" cy="269304"/>
           </a:xfrm>
           <a:prstGeom prst="rect">
             <a:avLst/>
@@ -15363,34 +15363,14 @@
               <a:t> </a:t>
             </a:r>
             <a:r>
-              <a:rPr sz="900" b="1" dirty="0">
+              <a:rPr lang="en-US" sz="900" b="1" spc="-25" dirty="0">
                 <a:solidFill>
                   <a:srgbClr val="FFFFFF"/>
                 </a:solidFill>
                 <a:latin typeface="Calibri"/>
                 <a:cs typeface="Calibri"/>
               </a:rPr>
-              <a:t>+</a:t>
-            </a:r>
-            <a:r>
-              <a:rPr sz="900" b="1" spc="-20" dirty="0">
-                <a:solidFill>
-                  <a:srgbClr val="FFFFFF"/>
-                </a:solidFill>
-                <a:latin typeface="Calibri"/>
-                <a:cs typeface="Calibri"/>
-              </a:rPr>
-              <a:t> </a:t>
-            </a:r>
-            <a:r>
-              <a:rPr sz="900" b="1" spc="-25" dirty="0">
-                <a:solidFill>
-                  <a:srgbClr val="FFFFFF"/>
-                </a:solidFill>
-                <a:latin typeface="Calibri"/>
-                <a:cs typeface="Calibri"/>
-              </a:rPr>
-              <a:t>RAG</a:t>
+              <a:t>Engine</a:t>
             </a:r>
             <a:endParaRPr sz="900" dirty="0">
               <a:latin typeface="Calibri"/>
@@ -15706,7 +15686,7 @@
         </p:nvSpPr>
         <p:spPr>
           <a:xfrm>
-            <a:off x="2071063" y="4518143"/>
+            <a:off x="2037344" y="4526621"/>
             <a:ext cx="454659" cy="139700"/>
           </a:xfrm>
           <a:prstGeom prst="rect">
@@ -15752,7 +15732,7 @@
         </p:nvSpPr>
         <p:spPr>
           <a:xfrm>
-            <a:off x="3984663" y="4514316"/>
+            <a:off x="3986651" y="4515408"/>
             <a:ext cx="586105" cy="139700"/>
           </a:xfrm>
           <a:prstGeom prst="rect">
@@ -15818,7 +15798,7 @@
         </p:nvSpPr>
         <p:spPr>
           <a:xfrm>
-            <a:off x="2892595" y="4520046"/>
+            <a:off x="2887240" y="4526621"/>
             <a:ext cx="1021386" cy="128240"/>
           </a:xfrm>
           <a:prstGeom prst="rect">
@@ -15864,7 +15844,7 @@
         </p:nvSpPr>
         <p:spPr>
           <a:xfrm>
-            <a:off x="4842037" y="4508281"/>
+            <a:off x="4859568" y="4526621"/>
             <a:ext cx="415290" cy="139700"/>
           </a:xfrm>
           <a:prstGeom prst="rect">
@@ -17152,7 +17132,7 @@
                 <a:latin typeface="Calibri"/>
                 <a:cs typeface="Calibri"/>
               </a:rPr>
-              <a:t>Python · Rule-based validation · Compliance checks</a:t>
+              <a:t>Python</a:t>
             </a:r>
             <a:endParaRPr sz="900" dirty="0">
               <a:latin typeface="Calibri"/>
@@ -24835,7 +24815,27 @@
                 <a:latin typeface="Calibri"/>
                 <a:cs typeface="Calibri"/>
               </a:rPr>
-              <a:t> Built using mature technologies: Next.js, FastAPI, OpenCV, PaddleOCR and PostgreSQL</a:t>
+              <a:t> Built using mature technologies: Next.js, FastAPI, OpenCV, </a:t>
+            </a:r>
+            <a:r>
+              <a:rPr lang="en-US" altLang="en-US" sz="900" spc="-10" dirty="0" err="1">
+                <a:solidFill>
+                  <a:srgbClr val="2A3544"/>
+                </a:solidFill>
+                <a:latin typeface="Calibri"/>
+                <a:cs typeface="Calibri"/>
+              </a:rPr>
+              <a:t>EasyOCR</a:t>
+            </a:r>
+            <a:r>
+              <a:rPr lang="en-US" altLang="en-US" sz="900" spc="-10" dirty="0">
+                <a:solidFill>
+                  <a:srgbClr val="2A3544"/>
+                </a:solidFill>
+                <a:latin typeface="Calibri"/>
+                <a:cs typeface="Calibri"/>
+              </a:rPr>
+              <a:t> and PostgreSQL</a:t>
             </a:r>
             <a:r>
               <a:rPr kumimoji="0" lang="en-US" altLang="en-US" sz="900" b="0" i="0" u="none" strike="noStrike" cap="none" normalizeH="0" baseline="0" dirty="0">
@@ -31435,6 +31435,16 @@
               </a:tabLst>
             </a:pPr>
             <a:r>
+              <a:rPr lang="en-US" sz="1000" dirty="0" err="1">
+                <a:solidFill>
+                  <a:srgbClr val="2A3544"/>
+                </a:solidFill>
+                <a:latin typeface="Calibri"/>
+                <a:cs typeface="Calibri"/>
+              </a:rPr>
+              <a:t>OCR.space</a:t>
+            </a:r>
+            <a:r>
               <a:rPr lang="en-US" sz="1000" dirty="0">
                 <a:solidFill>
                   <a:srgbClr val="2A3544"/>
@@ -31442,7 +31452,7 @@
                 <a:latin typeface="Calibri"/>
                 <a:cs typeface="Calibri"/>
               </a:rPr>
-              <a:t>OCR.space API — image-to-text extraction and OCR result overlays</a:t>
+              <a:t> API — image-to-text extraction and OCR result overlays</a:t>
             </a:r>
           </a:p>
           <a:p>

--- a/Assets/SIH-2026-VALIDRA.pptx
+++ b/Assets/SIH-2026-VALIDRA.pptx
@@ -141,7 +141,7 @@
           <a:p>
             <a:fld id="{1321ABF4-2A27-4B4A-B42C-D07480745A19}" type="datetimeFigureOut">
               <a:rPr lang="en-IN" smtClean="0"/>
-              <a:t>17-09-2026</a:t>
+              <a:t>21-09-2026</a:t>
             </a:fld>
             <a:endParaRPr lang="en-IN" dirty="0"/>
           </a:p>
@@ -2979,61 +2979,11 @@
         <p:grpSpPr>
           <a:xfrm>
             <a:off x="0" y="0"/>
-            <a:ext cx="12192126" cy="6400800"/>
+            <a:ext cx="10561319" cy="6400800"/>
             <a:chOff x="0" y="0"/>
-            <a:chExt cx="12192126" cy="6400800"/>
+            <a:chExt cx="10561319" cy="6400800"/>
           </a:xfrm>
         </p:grpSpPr>
-        <p:sp>
-          <p:nvSpPr>
-            <p:cNvPr id="3" name="object 3"/>
-            <p:cNvSpPr/>
-            <p:nvPr/>
-          </p:nvSpPr>
-          <p:spPr>
-            <a:xfrm>
-              <a:off x="256031" y="0"/>
-              <a:ext cx="11936095" cy="6400800"/>
-            </a:xfrm>
-            <a:custGeom>
-              <a:avLst/>
-              <a:gdLst/>
-              <a:ahLst/>
-              <a:cxnLst/>
-              <a:rect l="l" t="t" r="r" b="b"/>
-              <a:pathLst>
-                <a:path w="11936095" h="6400800">
-                  <a:moveTo>
-                    <a:pt x="0" y="6400800"/>
-                  </a:moveTo>
-                  <a:lnTo>
-                    <a:pt x="11935662" y="6400800"/>
-                  </a:lnTo>
-                  <a:lnTo>
-                    <a:pt x="11935662" y="0"/>
-                  </a:lnTo>
-                  <a:lnTo>
-                    <a:pt x="0" y="0"/>
-                  </a:lnTo>
-                  <a:lnTo>
-                    <a:pt x="0" y="6400800"/>
-                  </a:lnTo>
-                  <a:close/>
-                </a:path>
-              </a:pathLst>
-            </a:custGeom>
-            <a:solidFill>
-              <a:srgbClr val="FAFCFE"/>
-            </a:solidFill>
-          </p:spPr>
-          <p:txBody>
-            <a:bodyPr wrap="square" lIns="0" tIns="0" rIns="0" bIns="0" rtlCol="0"/>
-            <a:lstStyle/>
-            <a:p>
-              <a:endParaRPr dirty="0"/>
-            </a:p>
-          </p:txBody>
-        </p:sp>
         <p:pic>
           <p:nvPicPr>
             <p:cNvPr id="4" name="object 4"/>
@@ -3219,7 +3169,7 @@
         </p:nvSpPr>
         <p:spPr>
           <a:xfrm>
-            <a:off x="764539" y="557274"/>
+            <a:off x="3124200" y="43669"/>
             <a:ext cx="5337175" cy="482600"/>
           </a:xfrm>
           <a:prstGeom prst="rect">
@@ -3271,255 +3221,6 @@
           </a:p>
         </p:txBody>
       </p:sp>
-      <p:grpSp>
-        <p:nvGrpSpPr>
-          <p:cNvPr id="10" name="object 10"/>
-          <p:cNvGrpSpPr/>
-          <p:nvPr/>
-        </p:nvGrpSpPr>
-        <p:grpSpPr>
-          <a:xfrm>
-            <a:off x="718483" y="1179574"/>
-            <a:ext cx="2161540" cy="360680"/>
-            <a:chOff x="706881" y="1182369"/>
-            <a:chExt cx="2161540" cy="360680"/>
-          </a:xfrm>
-        </p:grpSpPr>
-        <p:sp>
-          <p:nvSpPr>
-            <p:cNvPr id="11" name="object 11"/>
-            <p:cNvSpPr/>
-            <p:nvPr/>
-          </p:nvSpPr>
-          <p:spPr>
-            <a:xfrm>
-              <a:off x="713231" y="1188719"/>
-              <a:ext cx="2148840" cy="347980"/>
-            </a:xfrm>
-            <a:custGeom>
-              <a:avLst/>
-              <a:gdLst/>
-              <a:ahLst/>
-              <a:cxnLst/>
-              <a:rect l="l" t="t" r="r" b="b"/>
-              <a:pathLst>
-                <a:path w="2148840" h="347980">
-                  <a:moveTo>
-                    <a:pt x="1975104" y="0"/>
-                  </a:moveTo>
-                  <a:lnTo>
-                    <a:pt x="173735" y="0"/>
-                  </a:lnTo>
-                  <a:lnTo>
-                    <a:pt x="127773" y="6250"/>
-                  </a:lnTo>
-                  <a:lnTo>
-                    <a:pt x="86333" y="23862"/>
-                  </a:lnTo>
-                  <a:lnTo>
-                    <a:pt x="51127" y="51127"/>
-                  </a:lnTo>
-                  <a:lnTo>
-                    <a:pt x="23862" y="86333"/>
-                  </a:lnTo>
-                  <a:lnTo>
-                    <a:pt x="6250" y="127773"/>
-                  </a:lnTo>
-                  <a:lnTo>
-                    <a:pt x="0" y="173735"/>
-                  </a:lnTo>
-                  <a:lnTo>
-                    <a:pt x="6250" y="219698"/>
-                  </a:lnTo>
-                  <a:lnTo>
-                    <a:pt x="23862" y="261138"/>
-                  </a:lnTo>
-                  <a:lnTo>
-                    <a:pt x="51127" y="296344"/>
-                  </a:lnTo>
-                  <a:lnTo>
-                    <a:pt x="86333" y="323609"/>
-                  </a:lnTo>
-                  <a:lnTo>
-                    <a:pt x="127773" y="341221"/>
-                  </a:lnTo>
-                  <a:lnTo>
-                    <a:pt x="173735" y="347472"/>
-                  </a:lnTo>
-                  <a:lnTo>
-                    <a:pt x="1975104" y="347472"/>
-                  </a:lnTo>
-                  <a:lnTo>
-                    <a:pt x="2021066" y="341221"/>
-                  </a:lnTo>
-                  <a:lnTo>
-                    <a:pt x="2062506" y="323609"/>
-                  </a:lnTo>
-                  <a:lnTo>
-                    <a:pt x="2097712" y="296344"/>
-                  </a:lnTo>
-                  <a:lnTo>
-                    <a:pt x="2124977" y="261138"/>
-                  </a:lnTo>
-                  <a:lnTo>
-                    <a:pt x="2142589" y="219698"/>
-                  </a:lnTo>
-                  <a:lnTo>
-                    <a:pt x="2148840" y="173735"/>
-                  </a:lnTo>
-                  <a:lnTo>
-                    <a:pt x="2142589" y="127773"/>
-                  </a:lnTo>
-                  <a:lnTo>
-                    <a:pt x="2124977" y="86333"/>
-                  </a:lnTo>
-                  <a:lnTo>
-                    <a:pt x="2097712" y="51127"/>
-                  </a:lnTo>
-                  <a:lnTo>
-                    <a:pt x="2062506" y="23862"/>
-                  </a:lnTo>
-                  <a:lnTo>
-                    <a:pt x="2021066" y="6250"/>
-                  </a:lnTo>
-                  <a:lnTo>
-                    <a:pt x="1975104" y="0"/>
-                  </a:lnTo>
-                  <a:close/>
-                </a:path>
-              </a:pathLst>
-            </a:custGeom>
-            <a:solidFill>
-              <a:srgbClr val="EDF2F9"/>
-            </a:solidFill>
-          </p:spPr>
-          <p:txBody>
-            <a:bodyPr wrap="square" lIns="0" tIns="0" rIns="0" bIns="0" rtlCol="0"/>
-            <a:lstStyle/>
-            <a:p>
-              <a:endParaRPr dirty="0"/>
-            </a:p>
-          </p:txBody>
-        </p:sp>
-        <p:sp>
-          <p:nvSpPr>
-            <p:cNvPr id="12" name="object 12"/>
-            <p:cNvSpPr/>
-            <p:nvPr/>
-          </p:nvSpPr>
-          <p:spPr>
-            <a:xfrm>
-              <a:off x="713231" y="1188719"/>
-              <a:ext cx="2148840" cy="347980"/>
-            </a:xfrm>
-            <a:custGeom>
-              <a:avLst/>
-              <a:gdLst/>
-              <a:ahLst/>
-              <a:cxnLst/>
-              <a:rect l="l" t="t" r="r" b="b"/>
-              <a:pathLst>
-                <a:path w="2148840" h="347980">
-                  <a:moveTo>
-                    <a:pt x="0" y="173735"/>
-                  </a:moveTo>
-                  <a:lnTo>
-                    <a:pt x="6250" y="127773"/>
-                  </a:lnTo>
-                  <a:lnTo>
-                    <a:pt x="23862" y="86333"/>
-                  </a:lnTo>
-                  <a:lnTo>
-                    <a:pt x="51127" y="51127"/>
-                  </a:lnTo>
-                  <a:lnTo>
-                    <a:pt x="86333" y="23862"/>
-                  </a:lnTo>
-                  <a:lnTo>
-                    <a:pt x="127773" y="6250"/>
-                  </a:lnTo>
-                  <a:lnTo>
-                    <a:pt x="173735" y="0"/>
-                  </a:lnTo>
-                  <a:lnTo>
-                    <a:pt x="1975104" y="0"/>
-                  </a:lnTo>
-                  <a:lnTo>
-                    <a:pt x="2021066" y="6250"/>
-                  </a:lnTo>
-                  <a:lnTo>
-                    <a:pt x="2062506" y="23862"/>
-                  </a:lnTo>
-                  <a:lnTo>
-                    <a:pt x="2097712" y="51127"/>
-                  </a:lnTo>
-                  <a:lnTo>
-                    <a:pt x="2124977" y="86333"/>
-                  </a:lnTo>
-                  <a:lnTo>
-                    <a:pt x="2142589" y="127773"/>
-                  </a:lnTo>
-                  <a:lnTo>
-                    <a:pt x="2148840" y="173735"/>
-                  </a:lnTo>
-                  <a:lnTo>
-                    <a:pt x="2142589" y="219698"/>
-                  </a:lnTo>
-                  <a:lnTo>
-                    <a:pt x="2124977" y="261138"/>
-                  </a:lnTo>
-                  <a:lnTo>
-                    <a:pt x="2097712" y="296344"/>
-                  </a:lnTo>
-                  <a:lnTo>
-                    <a:pt x="2062506" y="323609"/>
-                  </a:lnTo>
-                  <a:lnTo>
-                    <a:pt x="2021066" y="341221"/>
-                  </a:lnTo>
-                  <a:lnTo>
-                    <a:pt x="1975104" y="347472"/>
-                  </a:lnTo>
-                  <a:lnTo>
-                    <a:pt x="173735" y="347472"/>
-                  </a:lnTo>
-                  <a:lnTo>
-                    <a:pt x="127773" y="341221"/>
-                  </a:lnTo>
-                  <a:lnTo>
-                    <a:pt x="86333" y="323609"/>
-                  </a:lnTo>
-                  <a:lnTo>
-                    <a:pt x="51127" y="296344"/>
-                  </a:lnTo>
-                  <a:lnTo>
-                    <a:pt x="23862" y="261138"/>
-                  </a:lnTo>
-                  <a:lnTo>
-                    <a:pt x="6250" y="219698"/>
-                  </a:lnTo>
-                  <a:lnTo>
-                    <a:pt x="0" y="173735"/>
-                  </a:lnTo>
-                  <a:close/>
-                </a:path>
-              </a:pathLst>
-            </a:custGeom>
-            <a:ln w="12699">
-              <a:solidFill>
-                <a:srgbClr val="0070BF"/>
-              </a:solidFill>
-            </a:ln>
-          </p:spPr>
-          <p:txBody>
-            <a:bodyPr wrap="square" lIns="0" tIns="0" rIns="0" bIns="0" rtlCol="0"/>
-            <a:lstStyle/>
-            <a:p>
-              <a:endParaRPr dirty="0"/>
-            </a:p>
-          </p:txBody>
-        </p:sp>
-      </p:grpSp>
       <p:sp>
         <p:nvSpPr>
           <p:cNvPr id="13" name="object 13"/>
@@ -3529,7 +3230,7 @@
         <p:spPr>
           <a:xfrm>
             <a:off x="1149705" y="1256994"/>
-            <a:ext cx="1263650" cy="193040"/>
+            <a:ext cx="1263650" cy="182101"/>
           </a:xfrm>
           <a:prstGeom prst="rect">
             <a:avLst/>
@@ -3549,36 +3250,6 @@
                 <a:spcPts val="100"/>
               </a:spcBef>
             </a:pPr>
-            <a:r>
-              <a:rPr sz="1100" b="1" spc="75" dirty="0">
-                <a:solidFill>
-                  <a:srgbClr val="0070BF"/>
-                </a:solidFill>
-                <a:latin typeface="Calibri"/>
-                <a:cs typeface="Calibri"/>
-              </a:rPr>
-              <a:t>IDEA</a:t>
-            </a:r>
-            <a:r>
-              <a:rPr sz="1100" b="1" spc="200" dirty="0">
-                <a:solidFill>
-                  <a:srgbClr val="0070BF"/>
-                </a:solidFill>
-                <a:latin typeface="Calibri"/>
-                <a:cs typeface="Calibri"/>
-              </a:rPr>
-              <a:t> </a:t>
-            </a:r>
-            <a:r>
-              <a:rPr sz="1100" b="1" spc="75" dirty="0">
-                <a:solidFill>
-                  <a:srgbClr val="0070BF"/>
-                </a:solidFill>
-                <a:latin typeface="Calibri"/>
-                <a:cs typeface="Calibri"/>
-              </a:rPr>
-              <a:t>SUBMISSION</a:t>
-            </a:r>
             <a:endParaRPr sz="1100" dirty="0">
               <a:latin typeface="Calibri"/>
               <a:cs typeface="Calibri"/>
@@ -3594,8 +3265,8 @@
         </p:nvSpPr>
         <p:spPr>
           <a:xfrm>
-            <a:off x="764539" y="1596440"/>
-            <a:ext cx="3174365" cy="1000760"/>
+            <a:off x="810259" y="755651"/>
+            <a:ext cx="3174365" cy="689932"/>
           </a:xfrm>
           <a:prstGeom prst="rect">
             <a:avLst/>
@@ -3616,7 +3287,7 @@
               </a:spcBef>
             </a:pPr>
             <a:r>
-              <a:rPr sz="6400" b="1" spc="140" dirty="0">
+              <a:rPr sz="4400" b="1" spc="140" dirty="0">
                 <a:solidFill>
                   <a:srgbClr val="1F4D79"/>
                 </a:solidFill>
@@ -3625,7 +3296,7 @@
               </a:rPr>
               <a:t>VALIDRA</a:t>
             </a:r>
-            <a:endParaRPr sz="6400" dirty="0">
+            <a:endParaRPr sz="4400" dirty="0">
               <a:latin typeface="Calibri"/>
               <a:cs typeface="Calibri"/>
             </a:endParaRPr>
@@ -3640,7 +3311,7 @@
         </p:nvSpPr>
         <p:spPr>
           <a:xfrm>
-            <a:off x="810259" y="2649728"/>
+            <a:off x="823706" y="1439095"/>
             <a:ext cx="4836160" cy="254000"/>
           </a:xfrm>
           <a:prstGeom prst="rect">
@@ -3964,27 +3635,33 @@
           <p:cNvGraphicFramePr>
             <a:graphicFrameLocks noGrp="1"/>
           </p:cNvGraphicFramePr>
-          <p:nvPr/>
+          <p:nvPr>
+            <p:extLst>
+              <p:ext uri="{D42A27DB-BD31-4B8C-83A1-F6EECF244321}">
+                <p14:modId xmlns:p14="http://schemas.microsoft.com/office/powerpoint/2010/main" val="3830360545"/>
+              </p:ext>
+            </p:extLst>
+          </p:nvPr>
         </p:nvGraphicFramePr>
         <p:xfrm>
-          <a:off x="682624" y="3148330"/>
-          <a:ext cx="6019165" cy="2192655"/>
+          <a:off x="439420" y="1851159"/>
+          <a:ext cx="6712992" cy="3937933"/>
         </p:xfrm>
         <a:graphic>
           <a:graphicData uri="http://schemas.openxmlformats.org/drawingml/2006/table">
             <a:tbl>
               <a:tblPr firstRow="1" bandRow="1">
-                <a:tableStyleId>{2D5ABB26-0587-4C30-8999-92F81FD0307C}</a:tableStyleId>
+                <a:tableStyleId>{69012ECD-51FC-41F1-AA8D-1B2483CD663E}</a:tableStyleId>
               </a:tblPr>
               <a:tblGrid>
-                <a:gridCol w="1871345">
+                <a:gridCol w="2036445">
                   <a:extLst>
                     <a:ext uri="{9D8B030D-6E8A-4147-A177-3AD203B41FA5}">
                       <a16:colId xmlns:a16="http://schemas.microsoft.com/office/drawing/2014/main" val="20000"/>
                     </a:ext>
                   </a:extLst>
                 </a:gridCol>
-                <a:gridCol w="4147820">
+                <a:gridCol w="4676547">
                   <a:extLst>
                     <a:ext uri="{9D8B030D-6E8A-4147-A177-3AD203B41FA5}">
                       <a16:colId xmlns:a16="http://schemas.microsoft.com/office/drawing/2014/main" val="20001"/>
@@ -3992,7 +3669,56 @@
                   </a:extLst>
                 </a:gridCol>
               </a:tblGrid>
-              <a:tr h="353060">
+              <a:tr h="162728">
+                <a:tc>
+                  <a:txBody>
+                    <a:bodyPr/>
+                    <a:lstStyle/>
+                    <a:p>
+                      <a:pPr marL="210185">
+                        <a:lnSpc>
+                          <a:spcPct val="100000"/>
+                        </a:lnSpc>
+                        <a:spcBef>
+                          <a:spcPts val="565"/>
+                        </a:spcBef>
+                      </a:pPr>
+                      <a:endParaRPr sz="1400" dirty="0">
+                        <a:latin typeface="Calibri"/>
+                        <a:cs typeface="Calibri"/>
+                      </a:endParaRPr>
+                    </a:p>
+                  </a:txBody>
+                  <a:tcPr marL="0" marR="0" marT="71755" marB="0"/>
+                </a:tc>
+                <a:tc>
+                  <a:txBody>
+                    <a:bodyPr/>
+                    <a:lstStyle/>
+                    <a:p>
+                      <a:pPr marL="240665">
+                        <a:lnSpc>
+                          <a:spcPct val="100000"/>
+                        </a:lnSpc>
+                        <a:spcBef>
+                          <a:spcPts val="565"/>
+                        </a:spcBef>
+                      </a:pPr>
+                      <a:endParaRPr sz="1200" dirty="0">
+                        <a:latin typeface="Calibri"/>
+                        <a:cs typeface="Calibri"/>
+                      </a:endParaRPr>
+                    </a:p>
+                  </a:txBody>
+                  <a:tcPr marL="0" marR="0" marT="71755" marB="0"/>
+                </a:tc>
+                <a:extLst>
+                  <a:ext uri="{0D108BD9-81ED-4DB2-BD59-A6C34878D82A}">
+                    <a16:rowId xmlns:a16="http://schemas.microsoft.com/office/drawing/2014/main" val="146730888"/>
+                  </a:ext>
+                </a:extLst>
+              </a:tr>
+              <a:tr h="572315">
                 <a:tc>
                   <a:txBody>
                     <a:bodyPr/>
@@ -4007,78 +3733,52 @@
                         </a:spcBef>
                       </a:pPr>
                       <a:r>
-                        <a:rPr sz="1100" b="1" dirty="0">
+                        <a:rPr sz="1400" b="1" dirty="0">
                           <a:solidFill>
                             <a:srgbClr val="1F3864"/>
                           </a:solidFill>
-                          <a:latin typeface="Calibri"/>
-                          <a:cs typeface="Calibri"/>
                         </a:rPr>
                         <a:t>Problem</a:t>
                       </a:r>
                       <a:r>
-                        <a:rPr sz="1100" b="1" spc="-15" dirty="0">
+                        <a:rPr sz="1400" b="1" spc="-15" dirty="0">
                           <a:solidFill>
                             <a:srgbClr val="1F3864"/>
                           </a:solidFill>
-                          <a:latin typeface="Calibri"/>
-                          <a:cs typeface="Calibri"/>
                         </a:rPr>
                         <a:t> </a:t>
                       </a:r>
                       <a:r>
-                        <a:rPr sz="1100" b="1" spc="-10" dirty="0">
+                        <a:rPr sz="1400" b="1" spc="-10" dirty="0">
                           <a:solidFill>
                             <a:srgbClr val="1F3864"/>
                           </a:solidFill>
-                          <a:latin typeface="Calibri"/>
-                          <a:cs typeface="Calibri"/>
                         </a:rPr>
                         <a:t>Statement</a:t>
                       </a:r>
                       <a:r>
-                        <a:rPr sz="1100" b="1" spc="-15" dirty="0">
+                        <a:rPr sz="1400" b="1" spc="-15" dirty="0">
                           <a:solidFill>
                             <a:srgbClr val="1F3864"/>
                           </a:solidFill>
-                          <a:latin typeface="Calibri"/>
-                          <a:cs typeface="Calibri"/>
                         </a:rPr>
                         <a:t> </a:t>
                       </a:r>
                       <a:r>
-                        <a:rPr sz="1100" b="1" spc="-25" dirty="0">
+                        <a:rPr sz="1400" b="1" spc="-25" dirty="0">
                           <a:solidFill>
                             <a:srgbClr val="1F3864"/>
                           </a:solidFill>
-                          <a:latin typeface="Calibri"/>
-                          <a:cs typeface="Calibri"/>
                         </a:rPr>
                         <a:t>ID</a:t>
                       </a:r>
-                      <a:endParaRPr sz="1100" dirty="0">
+                      <a:endParaRPr sz="1400" dirty="0">
                         <a:latin typeface="Calibri"/>
                         <a:cs typeface="Calibri"/>
                       </a:endParaRPr>
                     </a:p>
                   </a:txBody>
-                  <a:tcPr marL="0" marR="0" marT="71755" marB="0">
-                    <a:lnL w="57150">
-                      <a:solidFill>
-                        <a:srgbClr val="0070BF"/>
-                      </a:solidFill>
-                      <a:prstDash val="solid"/>
-                    </a:lnL>
-                    <a:lnT w="12700">
-                      <a:solidFill>
-                        <a:srgbClr val="FFFFFF"/>
-                      </a:solidFill>
-                      <a:prstDash val="solid"/>
-                    </a:lnT>
-                    <a:solidFill>
-                      <a:srgbClr val="F4F7F9"/>
-                    </a:solidFill>
-                  </a:tcPr>
+                  <a:tcPr marL="0" marR="0" marT="71755" marB="0"/>
                 </a:tc>
                 <a:tc>
                   <a:txBody>
@@ -4094,38 +3794,28 @@
                         </a:spcBef>
                       </a:pPr>
                       <a:r>
-                        <a:rPr sz="1050" spc="-10" dirty="0">
+                        <a:rPr lang="en-US" sz="1200" spc="-10" dirty="0">
                           <a:solidFill>
                             <a:srgbClr val="2A3544"/>
                           </a:solidFill>
-                          <a:latin typeface="Calibri"/>
-                          <a:cs typeface="Calibri"/>
+                        </a:rPr>
+                        <a:t>SIH</a:t>
+                      </a:r>
+                      <a:r>
+                        <a:rPr sz="1200" spc="-10" dirty="0">
+                          <a:solidFill>
+                            <a:srgbClr val="2A3544"/>
+                          </a:solidFill>
                         </a:rPr>
                         <a:t>26034</a:t>
                       </a:r>
-                      <a:endParaRPr sz="1050" dirty="0">
+                      <a:endParaRPr sz="1200" dirty="0">
                         <a:latin typeface="Calibri"/>
                         <a:cs typeface="Calibri"/>
                       </a:endParaRPr>
                     </a:p>
                   </a:txBody>
-                  <a:tcPr marL="0" marR="0" marT="71755" marB="0">
-                    <a:lnR w="12700">
-                      <a:solidFill>
-                        <a:srgbClr val="FFFFFF"/>
-                      </a:solidFill>
-                      <a:prstDash val="solid"/>
-                    </a:lnR>
-                    <a:lnT w="12700">
-                      <a:solidFill>
-                        <a:srgbClr val="FFFFFF"/>
-                      </a:solidFill>
-                      <a:prstDash val="solid"/>
-                    </a:lnT>
-                    <a:solidFill>
-                      <a:srgbClr val="F4F7F9"/>
-                    </a:solidFill>
-                  </a:tcPr>
+                  <a:tcPr marL="0" marR="0" marT="71755" marB="0"/>
                 </a:tc>
                 <a:extLst>
                   <a:ext uri="{0D108BD9-81ED-4DB2-BD59-A6C34878D82A}">
@@ -4133,7 +3823,7 @@
                   </a:ext>
                 </a:extLst>
               </a:tr>
-              <a:tr h="719455">
+              <a:tr h="692426">
                 <a:tc>
                   <a:txBody>
                     <a:bodyPr/>
@@ -4147,10 +3837,7 @@
                           <a:spcPts val="835"/>
                         </a:spcBef>
                       </a:pPr>
-                      <a:endParaRPr sz="1100" dirty="0">
-                        <a:latin typeface="Times New Roman"/>
-                        <a:cs typeface="Times New Roman"/>
-                      </a:endParaRPr>
+                      <a:endParaRPr sz="1400" dirty="0"/>
                     </a:p>
                     <a:p>
                       <a:pPr marL="210185">
@@ -4159,72 +3846,52 @@
                         </a:lnSpc>
                       </a:pPr>
                       <a:r>
-                        <a:rPr sz="1100" b="1" dirty="0">
+                        <a:rPr sz="1400" b="1" dirty="0">
                           <a:solidFill>
                             <a:srgbClr val="1F3864"/>
                           </a:solidFill>
-                          <a:latin typeface="Calibri"/>
-                          <a:cs typeface="Calibri"/>
                         </a:rPr>
                         <a:t>Problem</a:t>
                       </a:r>
                       <a:r>
-                        <a:rPr sz="1100" b="1" spc="-15" dirty="0">
+                        <a:rPr sz="1400" b="1" spc="-15" dirty="0">
                           <a:solidFill>
                             <a:srgbClr val="1F3864"/>
                           </a:solidFill>
-                          <a:latin typeface="Calibri"/>
-                          <a:cs typeface="Calibri"/>
                         </a:rPr>
                         <a:t> </a:t>
                       </a:r>
                       <a:r>
-                        <a:rPr sz="1100" b="1" spc="-10" dirty="0">
+                        <a:rPr sz="1400" b="1" spc="-10" dirty="0">
                           <a:solidFill>
                             <a:srgbClr val="1F3864"/>
                           </a:solidFill>
-                          <a:latin typeface="Calibri"/>
-                          <a:cs typeface="Calibri"/>
                         </a:rPr>
                         <a:t>Statement</a:t>
                       </a:r>
                       <a:r>
-                        <a:rPr sz="1100" b="1" spc="-15" dirty="0">
+                        <a:rPr sz="1400" b="1" spc="-15" dirty="0">
                           <a:solidFill>
                             <a:srgbClr val="1F3864"/>
                           </a:solidFill>
-                          <a:latin typeface="Calibri"/>
-                          <a:cs typeface="Calibri"/>
                         </a:rPr>
                         <a:t> </a:t>
                       </a:r>
                       <a:r>
-                        <a:rPr sz="1100" b="1" spc="-10" dirty="0">
+                        <a:rPr sz="1400" b="1" spc="-10" dirty="0">
                           <a:solidFill>
                             <a:srgbClr val="1F3864"/>
                           </a:solidFill>
-                          <a:latin typeface="Calibri"/>
-                          <a:cs typeface="Calibri"/>
                         </a:rPr>
                         <a:t>Title</a:t>
                       </a:r>
-                      <a:endParaRPr sz="1100" dirty="0">
+                      <a:endParaRPr sz="1400" dirty="0">
                         <a:latin typeface="Calibri"/>
                         <a:cs typeface="Calibri"/>
                       </a:endParaRPr>
                     </a:p>
                   </a:txBody>
-                  <a:tcPr marL="0" marR="0" marT="106045" marB="0">
-                    <a:lnL w="57150">
-                      <a:solidFill>
-                        <a:srgbClr val="E7720C"/>
-                      </a:solidFill>
-                      <a:prstDash val="solid"/>
-                    </a:lnL>
-                    <a:solidFill>
-                      <a:srgbClr val="FFFFFF"/>
-                    </a:solidFill>
-                  </a:tcPr>
+                  <a:tcPr marL="0" marR="0" marT="106045" marB="0"/>
                 </a:tc>
                 <a:tc>
                   <a:txBody>
@@ -4240,412 +3907,324 @@
                         </a:spcBef>
                       </a:pPr>
                       <a:r>
-                        <a:rPr sz="1050" dirty="0">
+                        <a:rPr sz="1200" dirty="0">
                           <a:solidFill>
                             <a:srgbClr val="2A3544"/>
                           </a:solidFill>
-                          <a:latin typeface="Calibri"/>
-                          <a:cs typeface="Calibri"/>
                         </a:rPr>
                         <a:t>Software</a:t>
                       </a:r>
                       <a:r>
-                        <a:rPr sz="1050" spc="-35" dirty="0">
+                        <a:rPr sz="1200" spc="-35" dirty="0">
                           <a:solidFill>
                             <a:srgbClr val="2A3544"/>
                           </a:solidFill>
-                          <a:latin typeface="Calibri"/>
-                          <a:cs typeface="Calibri"/>
                         </a:rPr>
                         <a:t> </a:t>
                       </a:r>
                       <a:r>
-                        <a:rPr sz="1050" dirty="0">
+                        <a:rPr sz="1200" dirty="0">
                           <a:solidFill>
                             <a:srgbClr val="2A3544"/>
                           </a:solidFill>
-                          <a:latin typeface="Calibri"/>
-                          <a:cs typeface="Calibri"/>
                         </a:rPr>
                         <a:t>System</a:t>
                       </a:r>
                       <a:r>
-                        <a:rPr sz="1050" spc="-35" dirty="0">
+                        <a:rPr sz="1200" spc="-35" dirty="0">
                           <a:solidFill>
                             <a:srgbClr val="2A3544"/>
                           </a:solidFill>
-                          <a:latin typeface="Calibri"/>
-                          <a:cs typeface="Calibri"/>
                         </a:rPr>
                         <a:t> </a:t>
                       </a:r>
                       <a:r>
-                        <a:rPr sz="1050" dirty="0">
+                        <a:rPr sz="1200" dirty="0">
                           <a:solidFill>
                             <a:srgbClr val="2A3544"/>
                           </a:solidFill>
-                          <a:latin typeface="Calibri"/>
-                          <a:cs typeface="Calibri"/>
                         </a:rPr>
                         <a:t>to</a:t>
                       </a:r>
                       <a:r>
-                        <a:rPr sz="1050" spc="-35" dirty="0">
+                        <a:rPr sz="1200" spc="-35" dirty="0">
                           <a:solidFill>
                             <a:srgbClr val="2A3544"/>
                           </a:solidFill>
-                          <a:latin typeface="Calibri"/>
-                          <a:cs typeface="Calibri"/>
                         </a:rPr>
                         <a:t> </a:t>
                       </a:r>
                       <a:r>
-                        <a:rPr sz="1050" dirty="0">
+                        <a:rPr sz="1200" dirty="0">
                           <a:solidFill>
                             <a:srgbClr val="2A3544"/>
                           </a:solidFill>
-                          <a:latin typeface="Calibri"/>
-                          <a:cs typeface="Calibri"/>
                         </a:rPr>
                         <a:t>check</a:t>
                       </a:r>
                       <a:r>
-                        <a:rPr sz="1050" spc="-30" dirty="0">
+                        <a:rPr sz="1200" spc="-30" dirty="0">
                           <a:solidFill>
                             <a:srgbClr val="2A3544"/>
                           </a:solidFill>
-                          <a:latin typeface="Calibri"/>
-                          <a:cs typeface="Calibri"/>
                         </a:rPr>
                         <a:t> </a:t>
                       </a:r>
                       <a:r>
-                        <a:rPr sz="1050" dirty="0">
+                        <a:rPr sz="1200" dirty="0">
                           <a:solidFill>
                             <a:srgbClr val="2A3544"/>
                           </a:solidFill>
-                          <a:latin typeface="Calibri"/>
-                          <a:cs typeface="Calibri"/>
                         </a:rPr>
                         <a:t>compliance</a:t>
                       </a:r>
                       <a:r>
-                        <a:rPr sz="1050" spc="-35" dirty="0">
+                        <a:rPr sz="1200" spc="-35" dirty="0">
                           <a:solidFill>
                             <a:srgbClr val="2A3544"/>
                           </a:solidFill>
-                          <a:latin typeface="Calibri"/>
-                          <a:cs typeface="Calibri"/>
                         </a:rPr>
                         <a:t> </a:t>
                       </a:r>
                       <a:r>
-                        <a:rPr sz="1050" dirty="0">
+                        <a:rPr sz="1200" dirty="0">
                           <a:solidFill>
                             <a:srgbClr val="2A3544"/>
                           </a:solidFill>
-                          <a:latin typeface="Calibri"/>
-                          <a:cs typeface="Calibri"/>
                         </a:rPr>
                         <a:t>of</a:t>
                       </a:r>
                       <a:r>
-                        <a:rPr sz="1050" spc="-35" dirty="0">
+                        <a:rPr sz="1200" spc="-35" dirty="0">
                           <a:solidFill>
                             <a:srgbClr val="2A3544"/>
                           </a:solidFill>
-                          <a:latin typeface="Calibri"/>
-                          <a:cs typeface="Calibri"/>
                         </a:rPr>
                         <a:t> </a:t>
                       </a:r>
                       <a:r>
-                        <a:rPr sz="1050" dirty="0">
+                        <a:rPr sz="1200" dirty="0">
                           <a:solidFill>
                             <a:srgbClr val="2A3544"/>
                           </a:solidFill>
-                          <a:latin typeface="Calibri"/>
-                          <a:cs typeface="Calibri"/>
                         </a:rPr>
                         <a:t>Packaged</a:t>
                       </a:r>
                       <a:r>
-                        <a:rPr sz="1050" spc="-35" dirty="0">
+                        <a:rPr sz="1200" spc="-35" dirty="0">
                           <a:solidFill>
                             <a:srgbClr val="2A3544"/>
                           </a:solidFill>
-                          <a:latin typeface="Calibri"/>
-                          <a:cs typeface="Calibri"/>
                         </a:rPr>
                         <a:t> </a:t>
                       </a:r>
                       <a:r>
-                        <a:rPr sz="1050" spc="-10" dirty="0">
+                        <a:rPr sz="1200" spc="-10" dirty="0">
                           <a:solidFill>
                             <a:srgbClr val="2A3544"/>
                           </a:solidFill>
-                          <a:latin typeface="Calibri"/>
-                          <a:cs typeface="Calibri"/>
                         </a:rPr>
                         <a:t>Commodities </a:t>
                       </a:r>
                       <a:r>
-                        <a:rPr sz="1050" dirty="0">
+                        <a:rPr sz="1200" dirty="0">
                           <a:solidFill>
                             <a:srgbClr val="2A3544"/>
                           </a:solidFill>
-                          <a:latin typeface="Calibri"/>
-                          <a:cs typeface="Calibri"/>
                         </a:rPr>
                         <a:t>under</a:t>
                       </a:r>
                       <a:r>
-                        <a:rPr sz="1050" spc="-35" dirty="0">
+                        <a:rPr sz="1200" spc="-35" dirty="0">
                           <a:solidFill>
                             <a:srgbClr val="2A3544"/>
                           </a:solidFill>
-                          <a:latin typeface="Calibri"/>
-                          <a:cs typeface="Calibri"/>
                         </a:rPr>
                         <a:t> </a:t>
                       </a:r>
                       <a:r>
-                        <a:rPr sz="1050" dirty="0">
+                        <a:rPr sz="1200" dirty="0">
                           <a:solidFill>
                             <a:srgbClr val="2A3544"/>
                           </a:solidFill>
-                          <a:latin typeface="Calibri"/>
-                          <a:cs typeface="Calibri"/>
                         </a:rPr>
                         <a:t>Legal</a:t>
                       </a:r>
                       <a:r>
-                        <a:rPr sz="1050" spc="-35" dirty="0">
+                        <a:rPr sz="1200" spc="-35" dirty="0">
                           <a:solidFill>
                             <a:srgbClr val="2A3544"/>
                           </a:solidFill>
-                          <a:latin typeface="Calibri"/>
-                          <a:cs typeface="Calibri"/>
                         </a:rPr>
                         <a:t> </a:t>
                       </a:r>
                       <a:r>
-                        <a:rPr sz="1050" dirty="0">
+                        <a:rPr sz="1200" dirty="0">
                           <a:solidFill>
                             <a:srgbClr val="2A3544"/>
                           </a:solidFill>
-                          <a:latin typeface="Calibri"/>
-                          <a:cs typeface="Calibri"/>
                         </a:rPr>
                         <a:t>Metrology</a:t>
                       </a:r>
                       <a:r>
-                        <a:rPr sz="1050" spc="-35" dirty="0">
+                        <a:rPr sz="1200" spc="-35" dirty="0">
                           <a:solidFill>
                             <a:srgbClr val="2A3544"/>
                           </a:solidFill>
-                          <a:latin typeface="Calibri"/>
-                          <a:cs typeface="Calibri"/>
                         </a:rPr>
                         <a:t> </a:t>
                       </a:r>
                       <a:r>
-                        <a:rPr sz="1050" dirty="0">
+                        <a:rPr sz="1200" dirty="0">
                           <a:solidFill>
                             <a:srgbClr val="2A3544"/>
                           </a:solidFill>
-                          <a:latin typeface="Calibri"/>
-                          <a:cs typeface="Calibri"/>
                         </a:rPr>
                         <a:t>(Packaged</a:t>
                       </a:r>
                       <a:r>
-                        <a:rPr sz="1050" spc="-35" dirty="0">
+                        <a:rPr sz="1200" spc="-35" dirty="0">
                           <a:solidFill>
                             <a:srgbClr val="2A3544"/>
                           </a:solidFill>
-                          <a:latin typeface="Calibri"/>
-                          <a:cs typeface="Calibri"/>
                         </a:rPr>
                         <a:t> </a:t>
                       </a:r>
                       <a:r>
-                        <a:rPr sz="1050" dirty="0">
+                        <a:rPr sz="1200" dirty="0">
                           <a:solidFill>
                             <a:srgbClr val="2A3544"/>
                           </a:solidFill>
-                          <a:latin typeface="Calibri"/>
-                          <a:cs typeface="Calibri"/>
                         </a:rPr>
                         <a:t>Commodities)</a:t>
                       </a:r>
                       <a:r>
-                        <a:rPr sz="1050" spc="-35" dirty="0">
+                        <a:rPr sz="1200" spc="-35" dirty="0">
                           <a:solidFill>
                             <a:srgbClr val="2A3544"/>
                           </a:solidFill>
-                          <a:latin typeface="Calibri"/>
-                          <a:cs typeface="Calibri"/>
                         </a:rPr>
                         <a:t> </a:t>
                       </a:r>
                       <a:r>
-                        <a:rPr sz="1050" dirty="0">
+                        <a:rPr sz="1200" dirty="0">
                           <a:solidFill>
                             <a:srgbClr val="2A3544"/>
                           </a:solidFill>
-                          <a:latin typeface="Calibri"/>
-                          <a:cs typeface="Calibri"/>
                         </a:rPr>
                         <a:t>Rules,</a:t>
                       </a:r>
                       <a:r>
-                        <a:rPr sz="1050" spc="-35" dirty="0">
+                        <a:rPr sz="1200" spc="-35" dirty="0">
                           <a:solidFill>
                             <a:srgbClr val="2A3544"/>
                           </a:solidFill>
-                          <a:latin typeface="Calibri"/>
-                          <a:cs typeface="Calibri"/>
                         </a:rPr>
                         <a:t> </a:t>
                       </a:r>
                       <a:r>
-                        <a:rPr sz="1050" dirty="0">
+                        <a:rPr sz="1200" dirty="0">
                           <a:solidFill>
                             <a:srgbClr val="2A3544"/>
                           </a:solidFill>
-                          <a:latin typeface="Calibri"/>
-                          <a:cs typeface="Calibri"/>
                         </a:rPr>
                         <a:t>2011</a:t>
                       </a:r>
                       <a:r>
-                        <a:rPr sz="1050" spc="-30" dirty="0">
+                        <a:rPr sz="1200" spc="-30" dirty="0">
                           <a:solidFill>
                             <a:srgbClr val="2A3544"/>
                           </a:solidFill>
-                          <a:latin typeface="Calibri"/>
-                          <a:cs typeface="Calibri"/>
                         </a:rPr>
                         <a:t> </a:t>
                       </a:r>
                       <a:r>
-                        <a:rPr sz="1050" spc="-25" dirty="0">
+                        <a:rPr sz="1200" spc="-25" dirty="0">
                           <a:solidFill>
                             <a:srgbClr val="2A3544"/>
                           </a:solidFill>
-                          <a:latin typeface="Calibri"/>
-                          <a:cs typeface="Calibri"/>
                         </a:rPr>
                         <a:t>by </a:t>
                       </a:r>
                       <a:r>
-                        <a:rPr sz="1050" spc="-10" dirty="0">
+                        <a:rPr sz="1200" spc="-10" dirty="0">
                           <a:solidFill>
                             <a:srgbClr val="2A3544"/>
                           </a:solidFill>
-                          <a:latin typeface="Calibri"/>
-                          <a:cs typeface="Calibri"/>
                         </a:rPr>
                         <a:t>scanning</a:t>
                       </a:r>
                       <a:r>
-                        <a:rPr sz="1050" spc="-25" dirty="0">
+                        <a:rPr sz="1200" spc="-25" dirty="0">
                           <a:solidFill>
                             <a:srgbClr val="2A3544"/>
                           </a:solidFill>
-                          <a:latin typeface="Calibri"/>
-                          <a:cs typeface="Calibri"/>
                         </a:rPr>
                         <a:t> </a:t>
                       </a:r>
                       <a:r>
-                        <a:rPr sz="1050" dirty="0">
+                        <a:rPr sz="1200" dirty="0">
                           <a:solidFill>
                             <a:srgbClr val="2A3544"/>
                           </a:solidFill>
-                          <a:latin typeface="Calibri"/>
-                          <a:cs typeface="Calibri"/>
                         </a:rPr>
                         <a:t>products,</a:t>
                       </a:r>
                       <a:r>
-                        <a:rPr sz="1050" spc="-25" dirty="0">
+                        <a:rPr sz="1200" spc="-25" dirty="0">
                           <a:solidFill>
                             <a:srgbClr val="2A3544"/>
                           </a:solidFill>
-                          <a:latin typeface="Calibri"/>
-                          <a:cs typeface="Calibri"/>
                         </a:rPr>
                         <a:t> </a:t>
                       </a:r>
                       <a:r>
-                        <a:rPr sz="1050" dirty="0">
+                        <a:rPr sz="1200" dirty="0">
                           <a:solidFill>
                             <a:srgbClr val="2A3544"/>
                           </a:solidFill>
-                          <a:latin typeface="Calibri"/>
-                          <a:cs typeface="Calibri"/>
                         </a:rPr>
                         <a:t>images</a:t>
                       </a:r>
                       <a:r>
-                        <a:rPr sz="1050" spc="-25" dirty="0">
+                        <a:rPr sz="1200" spc="-25" dirty="0">
                           <a:solidFill>
                             <a:srgbClr val="2A3544"/>
                           </a:solidFill>
-                          <a:latin typeface="Calibri"/>
-                          <a:cs typeface="Calibri"/>
                         </a:rPr>
                         <a:t> </a:t>
                       </a:r>
                       <a:r>
-                        <a:rPr sz="1050" dirty="0">
+                        <a:rPr sz="1200" dirty="0">
                           <a:solidFill>
                             <a:srgbClr val="2A3544"/>
                           </a:solidFill>
-                          <a:latin typeface="Calibri"/>
-                          <a:cs typeface="Calibri"/>
                         </a:rPr>
                         <a:t>and</a:t>
                       </a:r>
                       <a:r>
-                        <a:rPr sz="1050" spc="-25" dirty="0">
+                        <a:rPr sz="1200" spc="-25" dirty="0">
                           <a:solidFill>
                             <a:srgbClr val="2A3544"/>
                           </a:solidFill>
-                          <a:latin typeface="Calibri"/>
-                          <a:cs typeface="Calibri"/>
                         </a:rPr>
                         <a:t> </a:t>
                       </a:r>
                       <a:r>
-                        <a:rPr sz="1050" spc="-10" dirty="0">
+                        <a:rPr sz="1200" spc="-10" dirty="0">
                           <a:solidFill>
                             <a:srgbClr val="2A3544"/>
                           </a:solidFill>
-                          <a:latin typeface="Calibri"/>
-                          <a:cs typeface="Calibri"/>
                         </a:rPr>
                         <a:t>labels</a:t>
                       </a:r>
-                      <a:endParaRPr sz="1050" dirty="0">
+                      <a:endParaRPr sz="1200" dirty="0">
                         <a:latin typeface="Calibri"/>
                         <a:cs typeface="Calibri"/>
                       </a:endParaRPr>
                     </a:p>
                   </a:txBody>
-                  <a:tcPr marL="0" marR="0" marT="126364" marB="0">
-                    <a:lnR w="12700">
-                      <a:solidFill>
-                        <a:srgbClr val="FFFFFF"/>
-                      </a:solidFill>
-                      <a:prstDash val="solid"/>
-                    </a:lnR>
-                    <a:solidFill>
-                      <a:srgbClr val="FFFFFF"/>
-                    </a:solidFill>
-                  </a:tcPr>
+                  <a:tcPr marL="0" marR="0" marT="126364" marB="0"/>
                 </a:tc>
                 <a:extLst>
                   <a:ext uri="{0D108BD9-81ED-4DB2-BD59-A6C34878D82A}">
@@ -4653,7 +4232,7 @@
                   </a:ext>
                 </a:extLst>
               </a:tr>
-              <a:tr h="377190">
+              <a:tr h="611430">
                 <a:tc>
                   <a:txBody>
                     <a:bodyPr/>
@@ -4668,32 +4247,28 @@
                         </a:spcBef>
                       </a:pPr>
                       <a:r>
-                        <a:rPr sz="1100" b="1" spc="-10" dirty="0">
+                        <a:rPr sz="1400" b="1" spc="-10" dirty="0">
                           <a:solidFill>
                             <a:srgbClr val="1F3864"/>
                           </a:solidFill>
-                          <a:latin typeface="Calibri"/>
-                          <a:cs typeface="Calibri"/>
                         </a:rPr>
                         <a:t>Theme</a:t>
                       </a:r>
-                      <a:endParaRPr sz="1100" dirty="0">
+                      <a:r>
+                        <a:rPr lang="en-US" sz="1400" b="1" spc="-10" dirty="0">
+                          <a:solidFill>
+                            <a:srgbClr val="1F3864"/>
+                          </a:solidFill>
+                        </a:rPr>
+                        <a:t> Bucket</a:t>
+                      </a:r>
+                      <a:endParaRPr sz="1400" dirty="0">
                         <a:latin typeface="Calibri"/>
                         <a:cs typeface="Calibri"/>
                       </a:endParaRPr>
                     </a:p>
                   </a:txBody>
-                  <a:tcPr marL="0" marR="0" marT="95885" marB="0">
-                    <a:lnL w="57150">
-                      <a:solidFill>
-                        <a:srgbClr val="0070BF"/>
-                      </a:solidFill>
-                      <a:prstDash val="solid"/>
-                    </a:lnL>
-                    <a:solidFill>
-                      <a:srgbClr val="F4F7F9"/>
-                    </a:solidFill>
-                  </a:tcPr>
+                  <a:tcPr marL="0" marR="0" marT="95885" marB="0"/>
                 </a:tc>
                 <a:tc>
                   <a:txBody>
@@ -4709,32 +4284,20 @@
                         </a:spcBef>
                       </a:pPr>
                       <a:r>
-                        <a:rPr sz="1050" spc="-10" dirty="0">
+                        <a:rPr sz="1200" spc="-10" dirty="0">
                           <a:solidFill>
                             <a:srgbClr val="2A3544"/>
                           </a:solidFill>
-                          <a:latin typeface="Calibri"/>
-                          <a:cs typeface="Calibri"/>
                         </a:rPr>
                         <a:t>Miscellaneous</a:t>
                       </a:r>
-                      <a:endParaRPr sz="1050" dirty="0">
+                      <a:endParaRPr sz="1200" dirty="0">
                         <a:latin typeface="Calibri"/>
                         <a:cs typeface="Calibri"/>
                       </a:endParaRPr>
                     </a:p>
                   </a:txBody>
-                  <a:tcPr marL="0" marR="0" marT="95885" marB="0">
-                    <a:lnR w="12700">
-                      <a:solidFill>
-                        <a:srgbClr val="FFFFFF"/>
-                      </a:solidFill>
-                      <a:prstDash val="solid"/>
-                    </a:lnR>
-                    <a:solidFill>
-                      <a:srgbClr val="F4F7F9"/>
-                    </a:solidFill>
-                  </a:tcPr>
+                  <a:tcPr marL="0" marR="0" marT="95885" marB="0"/>
                 </a:tc>
                 <a:extLst>
                   <a:ext uri="{0D108BD9-81ED-4DB2-BD59-A6C34878D82A}">
@@ -4742,7 +4305,7 @@
                   </a:ext>
                 </a:extLst>
               </a:tr>
-              <a:tr h="389890">
+              <a:tr h="632017">
                 <a:tc>
                   <a:txBody>
                     <a:bodyPr/>
@@ -4757,52 +4320,36 @@
                         </a:spcBef>
                       </a:pPr>
                       <a:r>
-                        <a:rPr sz="1100" b="1" dirty="0">
+                        <a:rPr sz="1400" b="1" dirty="0">
                           <a:solidFill>
                             <a:srgbClr val="1F3864"/>
                           </a:solidFill>
-                          <a:latin typeface="Calibri"/>
-                          <a:cs typeface="Calibri"/>
                         </a:rPr>
                         <a:t>PS</a:t>
                       </a:r>
                       <a:r>
-                        <a:rPr sz="1100" b="1" spc="-20" dirty="0">
+                        <a:rPr sz="1400" b="1" spc="-20" dirty="0">
                           <a:solidFill>
                             <a:srgbClr val="1F3864"/>
                           </a:solidFill>
-                          <a:latin typeface="Calibri"/>
-                          <a:cs typeface="Calibri"/>
                         </a:rPr>
                         <a:t> </a:t>
                       </a:r>
                       <a:r>
-                        <a:rPr sz="1100" b="1" spc="-10" dirty="0">
+                        <a:rPr sz="1400" b="1" spc="-10" dirty="0">
                           <a:solidFill>
                             <a:srgbClr val="1F3864"/>
                           </a:solidFill>
-                          <a:latin typeface="Calibri"/>
-                          <a:cs typeface="Calibri"/>
                         </a:rPr>
                         <a:t>Category</a:t>
                       </a:r>
-                      <a:endParaRPr sz="1100" dirty="0">
+                      <a:endParaRPr sz="1400" dirty="0">
                         <a:latin typeface="Calibri"/>
                         <a:cs typeface="Calibri"/>
                       </a:endParaRPr>
                     </a:p>
                   </a:txBody>
-                  <a:tcPr marL="0" marR="0" marT="102235" marB="0">
-                    <a:lnL w="57150">
-                      <a:solidFill>
-                        <a:srgbClr val="0070BF"/>
-                      </a:solidFill>
-                      <a:prstDash val="solid"/>
-                    </a:lnL>
-                    <a:solidFill>
-                      <a:srgbClr val="FFFFFF"/>
-                    </a:solidFill>
-                  </a:tcPr>
+                  <a:tcPr marL="0" marR="0" marT="102235" marB="0"/>
                 </a:tc>
                 <a:tc>
                   <a:txBody>
@@ -4818,32 +4365,24 @@
                         </a:spcBef>
                       </a:pPr>
                       <a:r>
-                        <a:rPr sz="1050" spc="-10" dirty="0">
+                        <a:rPr sz="1200" spc="-10" dirty="0">
                           <a:solidFill>
                             <a:srgbClr val="2A3544"/>
                           </a:solidFill>
-                          <a:latin typeface="Calibri"/>
-                          <a:cs typeface="Calibri"/>
                         </a:rPr>
                         <a:t>Software</a:t>
                       </a:r>
-                      <a:endParaRPr sz="1050" dirty="0">
+                      <a:endParaRPr sz="1200" spc="-10" dirty="0">
+                        <a:solidFill>
+                          <a:srgbClr val="2A3544"/>
+                        </a:solidFill>
                         <a:latin typeface="Calibri"/>
+                        <a:ea typeface="+mn-ea"/>
                         <a:cs typeface="Calibri"/>
                       </a:endParaRPr>
                     </a:p>
                   </a:txBody>
-                  <a:tcPr marL="0" marR="0" marT="102235" marB="0">
-                    <a:lnR w="12700">
-                      <a:solidFill>
-                        <a:srgbClr val="FFFFFF"/>
-                      </a:solidFill>
-                      <a:prstDash val="solid"/>
-                    </a:lnR>
-                    <a:solidFill>
-                      <a:srgbClr val="FFFFFF"/>
-                    </a:solidFill>
-                  </a:tcPr>
+                  <a:tcPr marL="0" marR="0" marT="102235" marB="0"/>
                 </a:tc>
                 <a:extLst>
                   <a:ext uri="{0D108BD9-81ED-4DB2-BD59-A6C34878D82A}">
@@ -4851,7 +4390,7 @@
                   </a:ext>
                 </a:extLst>
               </a:tr>
-              <a:tr h="353060">
+              <a:tr h="572315">
                 <a:tc>
                   <a:txBody>
                     <a:bodyPr/>
@@ -4866,58 +4405,36 @@
                         </a:spcBef>
                       </a:pPr>
                       <a:r>
-                        <a:rPr sz="1100" b="1" dirty="0">
+                        <a:rPr sz="1400" b="1" dirty="0">
                           <a:solidFill>
                             <a:srgbClr val="1F3864"/>
                           </a:solidFill>
-                          <a:latin typeface="Calibri"/>
-                          <a:cs typeface="Calibri"/>
                         </a:rPr>
                         <a:t>Team</a:t>
                       </a:r>
                       <a:r>
-                        <a:rPr sz="1100" b="1" spc="-45" dirty="0">
+                        <a:rPr sz="1400" b="1" spc="-45" dirty="0">
                           <a:solidFill>
                             <a:srgbClr val="1F3864"/>
                           </a:solidFill>
-                          <a:latin typeface="Calibri"/>
-                          <a:cs typeface="Calibri"/>
                         </a:rPr>
                         <a:t> </a:t>
                       </a:r>
                       <a:r>
-                        <a:rPr sz="1100" b="1" spc="-20" dirty="0">
+                        <a:rPr sz="1400" b="1" spc="-20" dirty="0">
                           <a:solidFill>
                             <a:srgbClr val="1F3864"/>
                           </a:solidFill>
-                          <a:latin typeface="Calibri"/>
-                          <a:cs typeface="Calibri"/>
                         </a:rPr>
                         <a:t>Name</a:t>
                       </a:r>
-                      <a:endParaRPr sz="1100" dirty="0">
+                      <a:endParaRPr sz="1400" dirty="0">
                         <a:latin typeface="Calibri"/>
                         <a:cs typeface="Calibri"/>
                       </a:endParaRPr>
                     </a:p>
                   </a:txBody>
-                  <a:tcPr marL="0" marR="0" marT="95885" marB="0">
-                    <a:lnL w="57150">
-                      <a:solidFill>
-                        <a:srgbClr val="0070BF"/>
-                      </a:solidFill>
-                      <a:prstDash val="solid"/>
-                    </a:lnL>
-                    <a:lnB w="12700">
-                      <a:solidFill>
-                        <a:srgbClr val="FFFFFF"/>
-                      </a:solidFill>
-                      <a:prstDash val="solid"/>
-                    </a:lnB>
-                    <a:solidFill>
-                      <a:srgbClr val="F4F7F9"/>
-                    </a:solidFill>
-                  </a:tcPr>
+                  <a:tcPr marL="0" marR="0" marT="95885" marB="0"/>
                 </a:tc>
                 <a:tc>
                   <a:txBody>
@@ -4929,46 +4446,105 @@
                           <a:spcPct val="100000"/>
                         </a:lnSpc>
                         <a:spcBef>
+                          <a:spcPts val="805"/>
+                        </a:spcBef>
+                      </a:pPr>
+                      <a:r>
+                        <a:rPr lang="en-US" sz="1200" spc="-10" dirty="0">
+                          <a:solidFill>
+                            <a:srgbClr val="2A3544"/>
+                          </a:solidFill>
+                        </a:rPr>
+                        <a:t>GECR6</a:t>
+                      </a:r>
+                      <a:endParaRPr sz="1200" spc="-10" dirty="0">
+                        <a:solidFill>
+                          <a:srgbClr val="2A3544"/>
+                        </a:solidFill>
+                        <a:latin typeface="Calibri"/>
+                        <a:ea typeface="+mn-ea"/>
+                        <a:cs typeface="Calibri"/>
+                      </a:endParaRPr>
+                    </a:p>
+                  </a:txBody>
+                  <a:tcPr marL="0" marR="0" marT="95885" marB="0"/>
+                </a:tc>
+                <a:extLst>
+                  <a:ext uri="{0D108BD9-81ED-4DB2-BD59-A6C34878D82A}">
+                    <a16:rowId xmlns:a16="http://schemas.microsoft.com/office/drawing/2014/main" val="10004"/>
+                  </a:ext>
+                </a:extLst>
+              </a:tr>
+              <a:tr h="572315">
+                <a:tc>
+                  <a:txBody>
+                    <a:bodyPr/>
+                    <a:lstStyle/>
+                    <a:p>
+                      <a:pPr marL="210185">
+                        <a:lnSpc>
+                          <a:spcPct val="100000"/>
+                        </a:lnSpc>
+                        <a:spcBef>
                           <a:spcPts val="755"/>
                         </a:spcBef>
                       </a:pPr>
                       <a:r>
-                        <a:rPr sz="1050" spc="-10" dirty="0">
+                        <a:rPr lang="en-US" sz="1400" b="1" dirty="0">
                           <a:solidFill>
-                            <a:srgbClr val="2A3544"/>
+                            <a:srgbClr val="1F3864"/>
                           </a:solidFill>
-                          <a:latin typeface="Calibri"/>
-                          <a:cs typeface="Calibri"/>
                         </a:rPr>
-                        <a:t>VisionMinds</a:t>
+                        <a:t>Team ID</a:t>
                       </a:r>
-                      <a:endParaRPr sz="1050" dirty="0">
+                      <a:endParaRPr sz="1400" b="1" dirty="0">
+                        <a:solidFill>
+                          <a:srgbClr val="1F3864"/>
+                        </a:solidFill>
                         <a:latin typeface="Calibri"/>
+                        <a:ea typeface="+mn-ea"/>
                         <a:cs typeface="Calibri"/>
                       </a:endParaRPr>
                     </a:p>
                   </a:txBody>
-                  <a:tcPr marL="0" marR="0" marT="95885" marB="0">
-                    <a:lnR w="12700">
-                      <a:solidFill>
-                        <a:srgbClr val="FFFFFF"/>
-                      </a:solidFill>
-                      <a:prstDash val="solid"/>
-                    </a:lnR>
-                    <a:lnB w="12700">
-                      <a:solidFill>
-                        <a:srgbClr val="FFFFFF"/>
-                      </a:solidFill>
-                      <a:prstDash val="solid"/>
-                    </a:lnB>
-                    <a:solidFill>
-                      <a:srgbClr val="F4F7F9"/>
-                    </a:solidFill>
-                  </a:tcPr>
+                  <a:tcPr marL="0" marR="0" marT="95885" marB="0"/>
+                </a:tc>
+                <a:tc>
+                  <a:txBody>
+                    <a:bodyPr/>
+                    <a:lstStyle/>
+                    <a:p>
+                      <a:pPr marL="240665">
+                        <a:lnSpc>
+                          <a:spcPct val="100000"/>
+                        </a:lnSpc>
+                        <a:spcBef>
+                          <a:spcPts val="805"/>
+                        </a:spcBef>
+                      </a:pPr>
+                      <a:r>
+                        <a:rPr lang="en-US" sz="1200" spc="-10" dirty="0">
+                          <a:solidFill>
+                            <a:srgbClr val="2A3544"/>
+                          </a:solidFill>
+                        </a:rPr>
+                        <a:t>153779</a:t>
+                      </a:r>
+                      <a:endParaRPr sz="1200" spc="-10" dirty="0">
+                        <a:solidFill>
+                          <a:srgbClr val="2A3544"/>
+                        </a:solidFill>
+                        <a:latin typeface="Calibri"/>
+                        <a:ea typeface="+mn-ea"/>
+                        <a:cs typeface="Calibri"/>
+                      </a:endParaRPr>
+                    </a:p>
+                  </a:txBody>
+                  <a:tcPr marL="0" marR="0" marT="95885" marB="0"/>
                 </a:tc>
                 <a:extLst>
                   <a:ext uri="{0D108BD9-81ED-4DB2-BD59-A6C34878D82A}">
-                    <a16:rowId xmlns:a16="http://schemas.microsoft.com/office/drawing/2014/main" val="10004"/>
+                    <a16:rowId xmlns:a16="http://schemas.microsoft.com/office/drawing/2014/main" val="3752827524"/>
                   </a:ext>
                 </a:extLst>
               </a:tr>
